--- a/src/ppt-super/assets/tpl-04-asis-tobe/template.pptx
+++ b/src/ppt-super/assets/tpl-04-asis-tobe/template.pptx
@@ -3136,7 +3136,14 @@
           <a:bodyPr rtlCol="0" anchor="ctr"/>
           <a:lstStyle/>
           <a:p>
-            <a:pPr algn="ctr"/>
+            <a:pPr algn="ctr">
+              <a:spcBef>
+                <a:spcPts val="0"/>
+              </a:spcBef>
+              <a:spcAft>
+                <a:spcPts val="0"/>
+              </a:spcAft>
+            </a:pPr>
           </a:p>
         </p:txBody>
       </p:sp>
@@ -3166,14 +3173,21 @@
               <a:lnSpc>
                 <a:spcPct val="112000"/>
               </a:lnSpc>
+              <a:spcBef>
+                <a:spcPts val="0"/>
+              </a:spcBef>
+              <a:spcAft>
+                <a:spcPts val="0"/>
+              </a:spcAft>
             </a:pPr>
             <a:r>
-              <a:rPr sz="1400" b="1" i="0">
+              <a:rPr sz="1400" b="1" i="0" lang="zh-CN" altLang="zh-CN">
                 <a:solidFill>
                   <a:srgbClr val="FFFFFF"/>
                 </a:solidFill>
                 <a:latin typeface="Microsoft YaHei"/>
                 <a:ea typeface="Microsoft YaHei"/>
+                <a:cs typeface="Microsoft YaHei"/>
               </a:rPr>
               <a:t>智能运维</a:t>
             </a:r>
@@ -3206,14 +3220,21 @@
               <a:lnSpc>
                 <a:spcPct val="112000"/>
               </a:lnSpc>
+              <a:spcBef>
+                <a:spcPts val="0"/>
+              </a:spcBef>
+              <a:spcAft>
+                <a:spcPts val="0"/>
+              </a:spcAft>
             </a:pPr>
             <a:r>
-              <a:rPr sz="2200" b="1" i="0">
+              <a:rPr sz="2200" b="1" i="0" lang="zh-CN" altLang="zh-CN">
                 <a:solidFill>
                   <a:srgbClr val="B90A0A"/>
                 </a:solidFill>
                 <a:latin typeface="Microsoft YaHei"/>
                 <a:ea typeface="Microsoft YaHei"/>
+                <a:cs typeface="Microsoft YaHei"/>
               </a:rPr>
               <a:t>运维模式升级: 人工经验驱动→数字孪生自动化, 故障恢复时长 -85%</a:t>
             </a:r>
@@ -3300,7 +3321,14 @@
           <a:bodyPr rtlCol="0" anchor="ctr"/>
           <a:lstStyle/>
           <a:p>
-            <a:pPr algn="ctr"/>
+            <a:pPr algn="ctr">
+              <a:spcBef>
+                <a:spcPts val="0"/>
+              </a:spcBef>
+              <a:spcAft>
+                <a:spcPts val="0"/>
+              </a:spcAft>
+            </a:pPr>
           </a:p>
         </p:txBody>
       </p:sp>
@@ -3344,7 +3372,14 @@
           <a:bodyPr rtlCol="0" anchor="ctr"/>
           <a:lstStyle/>
           <a:p>
-            <a:pPr algn="ctr"/>
+            <a:pPr algn="ctr">
+              <a:spcBef>
+                <a:spcPts val="0"/>
+              </a:spcBef>
+              <a:spcAft>
+                <a:spcPts val="0"/>
+              </a:spcAft>
+            </a:pPr>
           </a:p>
         </p:txBody>
       </p:sp>
@@ -3374,14 +3409,21 @@
               <a:lnSpc>
                 <a:spcPct val="112000"/>
               </a:lnSpc>
+              <a:spcBef>
+                <a:spcPts val="0"/>
+              </a:spcBef>
+              <a:spcAft>
+                <a:spcPts val="0"/>
+              </a:spcAft>
             </a:pPr>
             <a:r>
-              <a:rPr sz="1500" b="1" i="0">
+              <a:rPr sz="1500" b="1" i="0" lang="zh-CN" altLang="zh-CN">
                 <a:solidFill>
                   <a:srgbClr val="FFFFFF"/>
                 </a:solidFill>
                 <a:latin typeface="Microsoft YaHei"/>
                 <a:ea typeface="Microsoft YaHei"/>
+                <a:cs typeface="Microsoft YaHei"/>
               </a:rPr>
               <a:t>As-Is</a:t>
             </a:r>
@@ -3414,14 +3456,21 @@
               <a:lnSpc>
                 <a:spcPct val="112000"/>
               </a:lnSpc>
+              <a:spcBef>
+                <a:spcPts val="0"/>
+              </a:spcBef>
+              <a:spcAft>
+                <a:spcPts val="0"/>
+              </a:spcAft>
             </a:pPr>
             <a:r>
-              <a:rPr sz="1500" b="1" i="0">
+              <a:rPr sz="1500" b="1" i="0" lang="zh-CN" altLang="zh-CN">
                 <a:solidFill>
                   <a:srgbClr val="262626"/>
                 </a:solidFill>
                 <a:latin typeface="Microsoft YaHei"/>
                 <a:ea typeface="Microsoft YaHei"/>
+                <a:cs typeface="Microsoft YaHei"/>
               </a:rPr>
               <a:t>传统人工运维: 经验驱动, 被动响应</a:t>
             </a:r>
@@ -3490,14 +3539,21 @@
               <a:lnSpc>
                 <a:spcPct val="130000"/>
               </a:lnSpc>
+              <a:spcBef>
+                <a:spcPts val="0"/>
+              </a:spcBef>
+              <a:spcAft>
+                <a:spcPts val="0"/>
+              </a:spcAft>
             </a:pPr>
             <a:r>
-              <a:rPr sz="1150" b="0" i="0">
+              <a:rPr sz="1150" b="0" i="0" lang="zh-CN" altLang="zh-CN">
                 <a:solidFill>
                   <a:srgbClr val="262626"/>
                 </a:solidFill>
                 <a:latin typeface="Microsoft YaHei"/>
                 <a:ea typeface="Microsoft YaHei"/>
+                <a:cs typeface="Microsoft YaHei"/>
               </a:rPr>
               <a:t>当前运维高度依赖人工: 日均 2000 余条告警靠人工分拣, 关键告警漏报频发; 故障定位依赖专家个人经验, 平均耗时 4 小时以上; 变更依靠手工脚本执行, 窗口期长且失败率约 8%。知识沉淀在个人脑中, 骨干流失即出现能力断层; 跨域协同依赖工单流转, 单工单闭环周期长达 2-3 天; 巡检覆盖率不足 60%, 隐患发现往往依赖客户投诉; 容量规划仅凭历史经验外推, 资源利用率仅 35%, 整体模式已难以支撑业务规模的持续增长。</a:t>
             </a:r>
@@ -3544,7 +3600,14 @@
           <a:bodyPr rtlCol="0" anchor="ctr"/>
           <a:lstStyle/>
           <a:p>
-            <a:pPr algn="ctr"/>
+            <a:pPr algn="ctr">
+              <a:spcBef>
+                <a:spcPts val="0"/>
+              </a:spcBef>
+              <a:spcAft>
+                <a:spcPts val="0"/>
+              </a:spcAft>
+            </a:pPr>
           </a:p>
         </p:txBody>
       </p:sp>
@@ -3574,14 +3637,21 @@
               <a:lnSpc>
                 <a:spcPct val="112000"/>
               </a:lnSpc>
+              <a:spcBef>
+                <a:spcPts val="0"/>
+              </a:spcBef>
+              <a:spcAft>
+                <a:spcPts val="0"/>
+              </a:spcAft>
             </a:pPr>
             <a:r>
-              <a:rPr sz="1300" b="1" i="0">
+              <a:rPr sz="1300" b="1" i="0" lang="zh-CN" altLang="zh-CN">
                 <a:solidFill>
                   <a:srgbClr val="B90A0A"/>
                 </a:solidFill>
                 <a:latin typeface="Microsoft YaHei"/>
                 <a:ea typeface="Microsoft YaHei"/>
+                <a:cs typeface="Microsoft YaHei"/>
               </a:rPr>
               <a:t>MTTR 4 小时</a:t>
             </a:r>
@@ -3628,7 +3698,14 @@
           <a:bodyPr rtlCol="0" anchor="ctr"/>
           <a:lstStyle/>
           <a:p>
-            <a:pPr algn="ctr"/>
+            <a:pPr algn="ctr">
+              <a:spcBef>
+                <a:spcPts val="0"/>
+              </a:spcBef>
+              <a:spcAft>
+                <a:spcPts val="0"/>
+              </a:spcAft>
+            </a:pPr>
           </a:p>
         </p:txBody>
       </p:sp>
@@ -3658,14 +3735,21 @@
               <a:lnSpc>
                 <a:spcPct val="112000"/>
               </a:lnSpc>
+              <a:spcBef>
+                <a:spcPts val="0"/>
+              </a:spcBef>
+              <a:spcAft>
+                <a:spcPts val="0"/>
+              </a:spcAft>
             </a:pPr>
             <a:r>
-              <a:rPr sz="1300" b="1" i="0">
+              <a:rPr sz="1300" b="1" i="0" lang="zh-CN" altLang="zh-CN">
                 <a:solidFill>
                   <a:srgbClr val="B90A0A"/>
                 </a:solidFill>
                 <a:latin typeface="Microsoft YaHei"/>
                 <a:ea typeface="Microsoft YaHei"/>
+                <a:cs typeface="Microsoft YaHei"/>
               </a:rPr>
               <a:t>变更失败率 8%</a:t>
             </a:r>
@@ -3714,7 +3798,14 @@
           <a:bodyPr rtlCol="0" anchor="ctr"/>
           <a:lstStyle/>
           <a:p>
-            <a:pPr algn="ctr"/>
+            <a:pPr algn="ctr">
+              <a:spcBef>
+                <a:spcPts val="0"/>
+              </a:spcBef>
+              <a:spcAft>
+                <a:spcPts val="0"/>
+              </a:spcAft>
+            </a:pPr>
           </a:p>
         </p:txBody>
       </p:sp>
@@ -3868,7 +3959,14 @@
           <a:bodyPr rtlCol="0" anchor="ctr"/>
           <a:lstStyle/>
           <a:p>
-            <a:pPr algn="ctr"/>
+            <a:pPr algn="ctr">
+              <a:spcBef>
+                <a:spcPts val="0"/>
+              </a:spcBef>
+              <a:spcAft>
+                <a:spcPts val="0"/>
+              </a:spcAft>
+            </a:pPr>
           </a:p>
         </p:txBody>
       </p:sp>
@@ -4022,7 +4120,14 @@
           <a:bodyPr rtlCol="0" anchor="ctr"/>
           <a:lstStyle/>
           <a:p>
-            <a:pPr algn="ctr"/>
+            <a:pPr algn="ctr">
+              <a:spcBef>
+                <a:spcPts val="0"/>
+              </a:spcBef>
+              <a:spcAft>
+                <a:spcPts val="0"/>
+              </a:spcAft>
+            </a:pPr>
           </a:p>
         </p:txBody>
       </p:sp>
@@ -4236,14 +4341,21 @@
               <a:lnSpc>
                 <a:spcPct val="112000"/>
               </a:lnSpc>
+              <a:spcBef>
+                <a:spcPts val="0"/>
+              </a:spcBef>
+              <a:spcAft>
+                <a:spcPts val="0"/>
+              </a:spcAft>
             </a:pPr>
             <a:r>
-              <a:rPr sz="1050" b="0" i="0">
+              <a:rPr sz="1050" b="0" i="0" lang="zh-CN" altLang="zh-CN">
                 <a:solidFill>
                   <a:srgbClr val="595959"/>
                 </a:solidFill>
                 <a:latin typeface="Microsoft YaHei"/>
                 <a:ea typeface="Microsoft YaHei"/>
+                <a:cs typeface="Microsoft YaHei"/>
               </a:rPr>
               <a:t>文档驱动 · 人工流转 · 闭环周期 2-3 天</a:t>
             </a:r>
@@ -4292,7 +4404,14 @@
           <a:bodyPr rtlCol="0" anchor="ctr"/>
           <a:lstStyle/>
           <a:p>
-            <a:pPr algn="ctr"/>
+            <a:pPr algn="ctr">
+              <a:spcBef>
+                <a:spcPts val="0"/>
+              </a:spcBef>
+              <a:spcAft>
+                <a:spcPts val="0"/>
+              </a:spcAft>
+            </a:pPr>
           </a:p>
         </p:txBody>
       </p:sp>
@@ -4336,7 +4455,14 @@
           <a:bodyPr rtlCol="0" anchor="ctr"/>
           <a:lstStyle/>
           <a:p>
-            <a:pPr algn="ctr"/>
+            <a:pPr algn="ctr">
+              <a:spcBef>
+                <a:spcPts val="0"/>
+              </a:spcBef>
+              <a:spcAft>
+                <a:spcPts val="0"/>
+              </a:spcAft>
+            </a:pPr>
           </a:p>
         </p:txBody>
       </p:sp>
@@ -4366,14 +4492,21 @@
               <a:lnSpc>
                 <a:spcPct val="112000"/>
               </a:lnSpc>
+              <a:spcBef>
+                <a:spcPts val="0"/>
+              </a:spcBef>
+              <a:spcAft>
+                <a:spcPts val="0"/>
+              </a:spcAft>
             </a:pPr>
             <a:r>
-              <a:rPr sz="1500" b="1" i="0">
+              <a:rPr sz="1500" b="1" i="0" lang="zh-CN" altLang="zh-CN">
                 <a:solidFill>
                   <a:srgbClr val="FFFFFF"/>
                 </a:solidFill>
                 <a:latin typeface="Microsoft YaHei"/>
                 <a:ea typeface="Microsoft YaHei"/>
+                <a:cs typeface="Microsoft YaHei"/>
               </a:rPr>
               <a:t>To-Be</a:t>
             </a:r>
@@ -4406,14 +4539,21 @@
               <a:lnSpc>
                 <a:spcPct val="112000"/>
               </a:lnSpc>
+              <a:spcBef>
+                <a:spcPts val="0"/>
+              </a:spcBef>
+              <a:spcAft>
+                <a:spcPts val="0"/>
+              </a:spcAft>
             </a:pPr>
             <a:r>
-              <a:rPr sz="1500" b="1" i="0">
+              <a:rPr sz="1500" b="1" i="0" lang="zh-CN" altLang="zh-CN">
                 <a:solidFill>
                   <a:srgbClr val="262626"/>
                 </a:solidFill>
                 <a:latin typeface="Microsoft YaHei"/>
                 <a:ea typeface="Microsoft YaHei"/>
+                <a:cs typeface="Microsoft YaHei"/>
               </a:rPr>
               <a:t>数字孪生自动运维: 数据驱动, 主动预防</a:t>
             </a:r>
@@ -4482,14 +4622,21 @@
               <a:lnSpc>
                 <a:spcPct val="130000"/>
               </a:lnSpc>
+              <a:spcBef>
+                <a:spcPts val="0"/>
+              </a:spcBef>
+              <a:spcAft>
+                <a:spcPts val="0"/>
+              </a:spcAft>
             </a:pPr>
             <a:r>
-              <a:rPr sz="1150" b="0" i="0">
+              <a:rPr sz="1150" b="0" i="0" lang="zh-CN" altLang="zh-CN">
                 <a:solidFill>
                   <a:srgbClr val="262626"/>
                 </a:solidFill>
                 <a:latin typeface="Microsoft YaHei"/>
                 <a:ea typeface="Microsoft YaHei"/>
+                <a:cs typeface="Microsoft YaHei"/>
               </a:rPr>
               <a:t>目标态以数据驱动实现主动预防: 告警经智能压缩聚类后噪声下降 95%、漏报趋零; 根因 AI 定位实现分钟级响应, 平均耗时缩短至 15 分钟; 变更通过自动编排与灰度验证将失败率压降至 1% 以内。专家经验经知识图谱沉淀实现资产化, 新人周级上手; 跨域闭环自动流转使端到端周期压缩至 4 小时; 数字孪生全量仿真巡检可提前 7 天预警隐患; 容量 AI 预测滚动规划带动资源利用率提升至 60%, 运维模式整体转向数据驱动与主动经营。</a:t>
             </a:r>
@@ -4536,7 +4683,14 @@
           <a:bodyPr rtlCol="0" anchor="ctr"/>
           <a:lstStyle/>
           <a:p>
-            <a:pPr algn="ctr"/>
+            <a:pPr algn="ctr">
+              <a:spcBef>
+                <a:spcPts val="0"/>
+              </a:spcBef>
+              <a:spcAft>
+                <a:spcPts val="0"/>
+              </a:spcAft>
+            </a:pPr>
           </a:p>
         </p:txBody>
       </p:sp>
@@ -4566,14 +4720,21 @@
               <a:lnSpc>
                 <a:spcPct val="112000"/>
               </a:lnSpc>
+              <a:spcBef>
+                <a:spcPts val="0"/>
+              </a:spcBef>
+              <a:spcAft>
+                <a:spcPts val="0"/>
+              </a:spcAft>
             </a:pPr>
             <a:r>
-              <a:rPr sz="1300" b="1" i="0">
+              <a:rPr sz="1300" b="1" i="0" lang="zh-CN" altLang="zh-CN">
                 <a:solidFill>
                   <a:srgbClr val="262626"/>
                 </a:solidFill>
                 <a:latin typeface="Microsoft YaHei"/>
                 <a:ea typeface="Microsoft YaHei"/>
+                <a:cs typeface="Microsoft YaHei"/>
               </a:rPr>
               <a:t>MTTR 15 分钟</a:t>
             </a:r>
@@ -4620,7 +4781,14 @@
           <a:bodyPr rtlCol="0" anchor="ctr"/>
           <a:lstStyle/>
           <a:p>
-            <a:pPr algn="ctr"/>
+            <a:pPr algn="ctr">
+              <a:spcBef>
+                <a:spcPts val="0"/>
+              </a:spcBef>
+              <a:spcAft>
+                <a:spcPts val="0"/>
+              </a:spcAft>
+            </a:pPr>
           </a:p>
         </p:txBody>
       </p:sp>
@@ -4650,14 +4818,21 @@
               <a:lnSpc>
                 <a:spcPct val="112000"/>
               </a:lnSpc>
+              <a:spcBef>
+                <a:spcPts val="0"/>
+              </a:spcBef>
+              <a:spcAft>
+                <a:spcPts val="0"/>
+              </a:spcAft>
             </a:pPr>
             <a:r>
-              <a:rPr sz="1300" b="1" i="0">
+              <a:rPr sz="1300" b="1" i="0" lang="zh-CN" altLang="zh-CN">
                 <a:solidFill>
                   <a:srgbClr val="262626"/>
                 </a:solidFill>
                 <a:latin typeface="Microsoft YaHei"/>
                 <a:ea typeface="Microsoft YaHei"/>
+                <a:cs typeface="Microsoft YaHei"/>
               </a:rPr>
               <a:t>变更失败率 &lt;1%</a:t>
             </a:r>
@@ -4690,14 +4865,21 @@
               <a:lnSpc>
                 <a:spcPct val="112000"/>
               </a:lnSpc>
+              <a:spcBef>
+                <a:spcPts val="0"/>
+              </a:spcBef>
+              <a:spcAft>
+                <a:spcPts val="0"/>
+              </a:spcAft>
             </a:pPr>
             <a:r>
-              <a:rPr sz="1000" b="1" i="0">
+              <a:rPr sz="1000" b="1" i="0" lang="zh-CN" altLang="zh-CN">
                 <a:solidFill>
                   <a:srgbClr val="595959"/>
                 </a:solidFill>
                 <a:latin typeface="Microsoft YaHei"/>
                 <a:ea typeface="Microsoft YaHei"/>
+                <a:cs typeface="Microsoft YaHei"/>
               </a:rPr>
               <a:t>自动化率演进 (%)</a:t>
             </a:r>
@@ -4780,7 +4962,14 @@
           <a:bodyPr rtlCol="0" anchor="ctr"/>
           <a:lstStyle/>
           <a:p>
-            <a:pPr algn="ctr"/>
+            <a:pPr algn="ctr">
+              <a:spcBef>
+                <a:spcPts val="0"/>
+              </a:spcBef>
+              <a:spcAft>
+                <a:spcPts val="0"/>
+              </a:spcAft>
+            </a:pPr>
           </a:p>
         </p:txBody>
       </p:sp>
@@ -4792,8 +4981,8 @@
         </p:nvSpPr>
         <p:spPr>
           <a:xfrm>
-            <a:off x="7278158" y="4334565"/>
-            <a:ext cx="783166" cy="139700"/>
+            <a:off x="7278158" y="4314181"/>
+            <a:ext cx="783166" cy="180467"/>
           </a:xfrm>
           <a:prstGeom prst="rect">
             <a:avLst/>
@@ -4810,14 +4999,21 @@
               <a:lnSpc>
                 <a:spcPct val="112000"/>
               </a:lnSpc>
+              <a:spcBef>
+                <a:spcPts val="0"/>
+              </a:spcBef>
+              <a:spcAft>
+                <a:spcPts val="0"/>
+              </a:spcAft>
             </a:pPr>
             <a:r>
-              <a:rPr sz="1000" b="1" i="0">
+              <a:rPr sz="1000" b="1" i="0" lang="zh-CN" altLang="zh-CN">
                 <a:solidFill>
                   <a:srgbClr val="262626"/>
                 </a:solidFill>
                 <a:latin typeface="Microsoft YaHei"/>
                 <a:ea typeface="Microsoft YaHei"/>
+                <a:cs typeface="Microsoft YaHei"/>
               </a:rPr>
               <a:t>40%</a:t>
             </a:r>
@@ -4850,14 +5046,21 @@
               <a:lnSpc>
                 <a:spcPct val="112000"/>
               </a:lnSpc>
+              <a:spcBef>
+                <a:spcPts val="0"/>
+              </a:spcBef>
+              <a:spcAft>
+                <a:spcPts val="0"/>
+              </a:spcAft>
             </a:pPr>
             <a:r>
-              <a:rPr sz="950" b="0" i="0">
+              <a:rPr sz="950" b="0" i="0" lang="zh-CN" altLang="zh-CN">
                 <a:solidFill>
                   <a:srgbClr val="595959"/>
                 </a:solidFill>
                 <a:latin typeface="Microsoft YaHei"/>
                 <a:ea typeface="Microsoft YaHei"/>
+                <a:cs typeface="Microsoft YaHei"/>
               </a:rPr>
               <a:t>现状</a:t>
             </a:r>
@@ -4904,7 +5107,14 @@
           <a:bodyPr rtlCol="0" anchor="ctr"/>
           <a:lstStyle/>
           <a:p>
-            <a:pPr algn="ctr"/>
+            <a:pPr algn="ctr">
+              <a:spcBef>
+                <a:spcPts val="0"/>
+              </a:spcBef>
+              <a:spcAft>
+                <a:spcPts val="0"/>
+              </a:spcAft>
+            </a:pPr>
           </a:p>
         </p:txBody>
       </p:sp>
@@ -4916,8 +5126,8 @@
         </p:nvSpPr>
         <p:spPr>
           <a:xfrm>
-            <a:off x="8061324" y="4115020"/>
-            <a:ext cx="783166" cy="139700"/>
+            <a:off x="8061324" y="4094636"/>
+            <a:ext cx="783166" cy="180467"/>
           </a:xfrm>
           <a:prstGeom prst="rect">
             <a:avLst/>
@@ -4934,14 +5144,21 @@
               <a:lnSpc>
                 <a:spcPct val="112000"/>
               </a:lnSpc>
+              <a:spcBef>
+                <a:spcPts val="0"/>
+              </a:spcBef>
+              <a:spcAft>
+                <a:spcPts val="0"/>
+              </a:spcAft>
             </a:pPr>
             <a:r>
-              <a:rPr sz="1000" b="1" i="0">
+              <a:rPr sz="1000" b="1" i="0" lang="zh-CN" altLang="zh-CN">
                 <a:solidFill>
                   <a:srgbClr val="262626"/>
                 </a:solidFill>
                 <a:latin typeface="Microsoft YaHei"/>
                 <a:ea typeface="Microsoft YaHei"/>
+                <a:cs typeface="Microsoft YaHei"/>
               </a:rPr>
               <a:t>68%</a:t>
             </a:r>
@@ -4974,14 +5191,21 @@
               <a:lnSpc>
                 <a:spcPct val="112000"/>
               </a:lnSpc>
+              <a:spcBef>
+                <a:spcPts val="0"/>
+              </a:spcBef>
+              <a:spcAft>
+                <a:spcPts val="0"/>
+              </a:spcAft>
             </a:pPr>
             <a:r>
-              <a:rPr sz="950" b="0" i="0">
+              <a:rPr sz="950" b="0" i="0" lang="zh-CN" altLang="zh-CN">
                 <a:solidFill>
                   <a:srgbClr val="595959"/>
                 </a:solidFill>
                 <a:latin typeface="Microsoft YaHei"/>
                 <a:ea typeface="Microsoft YaHei"/>
+                <a:cs typeface="Microsoft YaHei"/>
               </a:rPr>
               <a:t>迁移期</a:t>
             </a:r>
@@ -5028,7 +5252,14 @@
           <a:bodyPr rtlCol="0" anchor="ctr"/>
           <a:lstStyle/>
           <a:p>
-            <a:pPr algn="ctr"/>
+            <a:pPr algn="ctr">
+              <a:spcBef>
+                <a:spcPts val="0"/>
+              </a:spcBef>
+              <a:spcAft>
+                <a:spcPts val="0"/>
+              </a:spcAft>
+            </a:pPr>
           </a:p>
         </p:txBody>
       </p:sp>
@@ -5040,8 +5271,8 @@
         </p:nvSpPr>
         <p:spPr>
           <a:xfrm>
-            <a:off x="8844491" y="3926840"/>
-            <a:ext cx="783166" cy="139700"/>
+            <a:off x="8844491" y="3906456"/>
+            <a:ext cx="783166" cy="180467"/>
           </a:xfrm>
           <a:prstGeom prst="rect">
             <a:avLst/>
@@ -5058,14 +5289,21 @@
               <a:lnSpc>
                 <a:spcPct val="112000"/>
               </a:lnSpc>
+              <a:spcBef>
+                <a:spcPts val="0"/>
+              </a:spcBef>
+              <a:spcAft>
+                <a:spcPts val="0"/>
+              </a:spcAft>
             </a:pPr>
             <a:r>
-              <a:rPr sz="1000" b="1" i="0">
+              <a:rPr sz="1000" b="1" i="0" lang="zh-CN" altLang="zh-CN">
                 <a:solidFill>
                   <a:srgbClr val="262626"/>
                 </a:solidFill>
                 <a:latin typeface="Microsoft YaHei"/>
                 <a:ea typeface="Microsoft YaHei"/>
+                <a:cs typeface="Microsoft YaHei"/>
               </a:rPr>
               <a:t>92%</a:t>
             </a:r>
@@ -5098,14 +5336,21 @@
               <a:lnSpc>
                 <a:spcPct val="112000"/>
               </a:lnSpc>
+              <a:spcBef>
+                <a:spcPts val="0"/>
+              </a:spcBef>
+              <a:spcAft>
+                <a:spcPts val="0"/>
+              </a:spcAft>
             </a:pPr>
             <a:r>
-              <a:rPr sz="950" b="0" i="0">
+              <a:rPr sz="950" b="0" i="0" lang="zh-CN" altLang="zh-CN">
                 <a:solidFill>
                   <a:srgbClr val="595959"/>
                 </a:solidFill>
                 <a:latin typeface="Microsoft YaHei"/>
                 <a:ea typeface="Microsoft YaHei"/>
+                <a:cs typeface="Microsoft YaHei"/>
               </a:rPr>
               <a:t>目标</a:t>
             </a:r>
@@ -5247,14 +5492,21 @@
               <a:lnSpc>
                 <a:spcPct val="112000"/>
               </a:lnSpc>
+              <a:spcBef>
+                <a:spcPts val="0"/>
+              </a:spcBef>
+              <a:spcAft>
+                <a:spcPts val="0"/>
+              </a:spcAft>
             </a:pPr>
             <a:r>
-              <a:rPr sz="1050" b="0" i="0">
+              <a:rPr sz="1050" b="0" i="0" lang="zh-CN" altLang="zh-CN">
                 <a:solidFill>
                   <a:srgbClr val="595959"/>
                 </a:solidFill>
                 <a:latin typeface="Microsoft YaHei"/>
                 <a:ea typeface="Microsoft YaHei"/>
+                <a:cs typeface="Microsoft YaHei"/>
               </a:rPr>
               <a:t>自动化率持续爬升</a:t>
             </a:r>
@@ -5301,7 +5553,14 @@
           <a:bodyPr rtlCol="0" anchor="ctr"/>
           <a:lstStyle/>
           <a:p>
-            <a:pPr algn="ctr"/>
+            <a:pPr algn="ctr">
+              <a:spcBef>
+                <a:spcPts val="0"/>
+              </a:spcBef>
+              <a:spcAft>
+                <a:spcPts val="0"/>
+              </a:spcAft>
+            </a:pPr>
           </a:p>
         </p:txBody>
       </p:sp>
@@ -5348,7 +5607,14 @@
           <a:bodyPr rtlCol="0" anchor="ctr"/>
           <a:lstStyle/>
           <a:p>
-            <a:pPr algn="ctr"/>
+            <a:pPr algn="ctr">
+              <a:spcBef>
+                <a:spcPts val="0"/>
+              </a:spcBef>
+              <a:spcAft>
+                <a:spcPts val="0"/>
+              </a:spcAft>
+            </a:pPr>
           </a:p>
         </p:txBody>
       </p:sp>
@@ -5378,14 +5644,21 @@
               <a:lnSpc>
                 <a:spcPct val="112000"/>
               </a:lnSpc>
+              <a:spcBef>
+                <a:spcPts val="0"/>
+              </a:spcBef>
+              <a:spcAft>
+                <a:spcPts val="0"/>
+              </a:spcAft>
             </a:pPr>
             <a:r>
-              <a:rPr sz="1300" b="1" i="0">
+              <a:rPr sz="1300" b="1" i="0" lang="zh-CN" altLang="zh-CN">
                 <a:solidFill>
                   <a:srgbClr val="B90A0A"/>
                 </a:solidFill>
                 <a:latin typeface="Microsoft YaHei"/>
                 <a:ea typeface="Microsoft YaHei"/>
+                <a:cs typeface="Microsoft YaHei"/>
               </a:rPr>
               <a:t>数字孪生迁移</a:t>
             </a:r>
@@ -5472,7 +5745,14 @@
           <a:bodyPr rtlCol="0" anchor="ctr"/>
           <a:lstStyle/>
           <a:p>
-            <a:pPr algn="ctr"/>
+            <a:pPr algn="ctr">
+              <a:spcBef>
+                <a:spcPts val="0"/>
+              </a:spcBef>
+              <a:spcAft>
+                <a:spcPts val="0"/>
+              </a:spcAft>
+            </a:pPr>
           </a:p>
         </p:txBody>
       </p:sp>
@@ -5516,7 +5796,14 @@
           <a:bodyPr rtlCol="0" anchor="ctr"/>
           <a:lstStyle/>
           <a:p>
-            <a:pPr algn="ctr"/>
+            <a:pPr algn="ctr">
+              <a:spcBef>
+                <a:spcPts val="0"/>
+              </a:spcBef>
+              <a:spcAft>
+                <a:spcPts val="0"/>
+              </a:spcAft>
+            </a:pPr>
           </a:p>
         </p:txBody>
       </p:sp>
@@ -5528,8 +5815,8 @@
         </p:nvSpPr>
         <p:spPr>
           <a:xfrm>
-            <a:off x="5499100" y="3886200"/>
-            <a:ext cx="127000" cy="139700"/>
+            <a:off x="5493575" y="3865816"/>
+            <a:ext cx="138049" cy="180467"/>
           </a:xfrm>
           <a:prstGeom prst="rect">
             <a:avLst/>
@@ -5546,14 +5833,21 @@
               <a:lnSpc>
                 <a:spcPct val="112000"/>
               </a:lnSpc>
+              <a:spcBef>
+                <a:spcPts val="0"/>
+              </a:spcBef>
+              <a:spcAft>
+                <a:spcPts val="0"/>
+              </a:spcAft>
             </a:pPr>
             <a:r>
-              <a:rPr sz="1000" b="1" i="0">
+              <a:rPr sz="1000" b="1" i="0" lang="zh-CN" altLang="zh-CN">
                 <a:solidFill>
                   <a:srgbClr val="FFFFFF"/>
                 </a:solidFill>
                 <a:latin typeface="Microsoft YaHei"/>
                 <a:ea typeface="Microsoft YaHei"/>
+                <a:cs typeface="Microsoft YaHei"/>
               </a:rPr>
               <a:t>1</a:t>
             </a:r>
@@ -5586,14 +5880,21 @@
               <a:lnSpc>
                 <a:spcPct val="112000"/>
               </a:lnSpc>
+              <a:spcBef>
+                <a:spcPts val="0"/>
+              </a:spcBef>
+              <a:spcAft>
+                <a:spcPts val="0"/>
+              </a:spcAft>
             </a:pPr>
             <a:r>
-              <a:rPr sz="1100" b="1" i="0">
+              <a:rPr sz="1100" b="1" i="0" lang="zh-CN" altLang="zh-CN">
                 <a:solidFill>
                   <a:srgbClr val="1F4E79"/>
                 </a:solidFill>
                 <a:latin typeface="Microsoft YaHei"/>
                 <a:ea typeface="Microsoft YaHei"/>
+                <a:cs typeface="Microsoft YaHei"/>
               </a:rPr>
               <a:t>数据底座统一</a:t>
             </a:r>
@@ -5680,7 +5981,14 @@
           <a:bodyPr rtlCol="0" anchor="ctr"/>
           <a:lstStyle/>
           <a:p>
-            <a:pPr algn="ctr"/>
+            <a:pPr algn="ctr">
+              <a:spcBef>
+                <a:spcPts val="0"/>
+              </a:spcBef>
+              <a:spcAft>
+                <a:spcPts val="0"/>
+              </a:spcAft>
+            </a:pPr>
           </a:p>
         </p:txBody>
       </p:sp>
@@ -5724,7 +6032,14 @@
           <a:bodyPr rtlCol="0" anchor="ctr"/>
           <a:lstStyle/>
           <a:p>
-            <a:pPr algn="ctr"/>
+            <a:pPr algn="ctr">
+              <a:spcBef>
+                <a:spcPts val="0"/>
+              </a:spcBef>
+              <a:spcAft>
+                <a:spcPts val="0"/>
+              </a:spcAft>
+            </a:pPr>
           </a:p>
         </p:txBody>
       </p:sp>
@@ -5736,8 +6051,8 @@
         </p:nvSpPr>
         <p:spPr>
           <a:xfrm>
-            <a:off x="5499100" y="4343400"/>
-            <a:ext cx="127000" cy="139700"/>
+            <a:off x="5493575" y="4323016"/>
+            <a:ext cx="138049" cy="180467"/>
           </a:xfrm>
           <a:prstGeom prst="rect">
             <a:avLst/>
@@ -5754,14 +6069,21 @@
               <a:lnSpc>
                 <a:spcPct val="112000"/>
               </a:lnSpc>
+              <a:spcBef>
+                <a:spcPts val="0"/>
+              </a:spcBef>
+              <a:spcAft>
+                <a:spcPts val="0"/>
+              </a:spcAft>
             </a:pPr>
             <a:r>
-              <a:rPr sz="1000" b="1" i="0">
+              <a:rPr sz="1000" b="1" i="0" lang="zh-CN" altLang="zh-CN">
                 <a:solidFill>
                   <a:srgbClr val="FFFFFF"/>
                 </a:solidFill>
                 <a:latin typeface="Microsoft YaHei"/>
                 <a:ea typeface="Microsoft YaHei"/>
+                <a:cs typeface="Microsoft YaHei"/>
               </a:rPr>
               <a:t>2</a:t>
             </a:r>
@@ -5794,14 +6116,21 @@
               <a:lnSpc>
                 <a:spcPct val="112000"/>
               </a:lnSpc>
+              <a:spcBef>
+                <a:spcPts val="0"/>
+              </a:spcBef>
+              <a:spcAft>
+                <a:spcPts val="0"/>
+              </a:spcAft>
             </a:pPr>
             <a:r>
-              <a:rPr sz="1100" b="1" i="0">
+              <a:rPr sz="1100" b="1" i="0" lang="zh-CN" altLang="zh-CN">
                 <a:solidFill>
                   <a:srgbClr val="1F4E79"/>
                 </a:solidFill>
                 <a:latin typeface="Microsoft YaHei"/>
                 <a:ea typeface="Microsoft YaHei"/>
+                <a:cs typeface="Microsoft YaHei"/>
               </a:rPr>
               <a:t>孪生建模上线</a:t>
             </a:r>
@@ -5888,7 +6217,14 @@
           <a:bodyPr rtlCol="0" anchor="ctr"/>
           <a:lstStyle/>
           <a:p>
-            <a:pPr algn="ctr"/>
+            <a:pPr algn="ctr">
+              <a:spcBef>
+                <a:spcPts val="0"/>
+              </a:spcBef>
+              <a:spcAft>
+                <a:spcPts val="0"/>
+              </a:spcAft>
+            </a:pPr>
           </a:p>
         </p:txBody>
       </p:sp>
@@ -5932,7 +6268,14 @@
           <a:bodyPr rtlCol="0" anchor="ctr"/>
           <a:lstStyle/>
           <a:p>
-            <a:pPr algn="ctr"/>
+            <a:pPr algn="ctr">
+              <a:spcBef>
+                <a:spcPts val="0"/>
+              </a:spcBef>
+              <a:spcAft>
+                <a:spcPts val="0"/>
+              </a:spcAft>
+            </a:pPr>
           </a:p>
         </p:txBody>
       </p:sp>
@@ -5944,8 +6287,8 @@
         </p:nvSpPr>
         <p:spPr>
           <a:xfrm>
-            <a:off x="5499100" y="4800600"/>
-            <a:ext cx="127000" cy="139700"/>
+            <a:off x="5493575" y="4780216"/>
+            <a:ext cx="138049" cy="180467"/>
           </a:xfrm>
           <a:prstGeom prst="rect">
             <a:avLst/>
@@ -5962,14 +6305,21 @@
               <a:lnSpc>
                 <a:spcPct val="112000"/>
               </a:lnSpc>
+              <a:spcBef>
+                <a:spcPts val="0"/>
+              </a:spcBef>
+              <a:spcAft>
+                <a:spcPts val="0"/>
+              </a:spcAft>
             </a:pPr>
             <a:r>
-              <a:rPr sz="1000" b="1" i="0">
+              <a:rPr sz="1000" b="1" i="0" lang="zh-CN" altLang="zh-CN">
                 <a:solidFill>
                   <a:srgbClr val="FFFFFF"/>
                 </a:solidFill>
                 <a:latin typeface="Microsoft YaHei"/>
                 <a:ea typeface="Microsoft YaHei"/>
+                <a:cs typeface="Microsoft YaHei"/>
               </a:rPr>
               <a:t>3</a:t>
             </a:r>
@@ -6002,14 +6352,21 @@
               <a:lnSpc>
                 <a:spcPct val="112000"/>
               </a:lnSpc>
+              <a:spcBef>
+                <a:spcPts val="0"/>
+              </a:spcBef>
+              <a:spcAft>
+                <a:spcPts val="0"/>
+              </a:spcAft>
             </a:pPr>
             <a:r>
-              <a:rPr sz="1100" b="1" i="0">
+              <a:rPr sz="1100" b="1" i="0" lang="zh-CN" altLang="zh-CN">
                 <a:solidFill>
                   <a:srgbClr val="1F4E79"/>
                 </a:solidFill>
                 <a:latin typeface="Microsoft YaHei"/>
                 <a:ea typeface="Microsoft YaHei"/>
+                <a:cs typeface="Microsoft YaHei"/>
               </a:rPr>
               <a:t>闭环自动化</a:t>
             </a:r>
@@ -6056,7 +6413,14 @@
           <a:bodyPr rtlCol="0" anchor="ctr"/>
           <a:lstStyle/>
           <a:p>
-            <a:pPr algn="ctr"/>
+            <a:pPr algn="ctr">
+              <a:spcBef>
+                <a:spcPts val="0"/>
+              </a:spcBef>
+              <a:spcAft>
+                <a:spcPts val="0"/>
+              </a:spcAft>
+            </a:pPr>
           </a:p>
         </p:txBody>
       </p:sp>
@@ -6100,7 +6464,14 @@
           <a:bodyPr rtlCol="0" anchor="ctr"/>
           <a:lstStyle/>
           <a:p>
-            <a:pPr algn="ctr"/>
+            <a:pPr algn="ctr">
+              <a:spcBef>
+                <a:spcPts val="0"/>
+              </a:spcBef>
+              <a:spcAft>
+                <a:spcPts val="0"/>
+              </a:spcAft>
+            </a:pPr>
           </a:p>
         </p:txBody>
       </p:sp>
@@ -6130,14 +6501,21 @@
               <a:lnSpc>
                 <a:spcPct val="112000"/>
               </a:lnSpc>
+              <a:spcBef>
+                <a:spcPts val="0"/>
+              </a:spcBef>
+              <a:spcAft>
+                <a:spcPts val="0"/>
+              </a:spcAft>
             </a:pPr>
             <a:r>
-              <a:rPr sz="1300" b="1" i="0">
+              <a:rPr sz="1300" b="1" i="0" lang="zh-CN" altLang="zh-CN">
                 <a:solidFill>
                   <a:srgbClr val="B90A0A"/>
                 </a:solidFill>
                 <a:latin typeface="Microsoft YaHei"/>
                 <a:ea typeface="Microsoft YaHei"/>
+                <a:cs typeface="Microsoft YaHei"/>
               </a:rPr>
               <a:t>迁移收益</a:t>
             </a:r>
@@ -6170,14 +6548,21 @@
               <a:lnSpc>
                 <a:spcPct val="112000"/>
               </a:lnSpc>
+              <a:spcBef>
+                <a:spcPts val="0"/>
+              </a:spcBef>
+              <a:spcAft>
+                <a:spcPts val="0"/>
+              </a:spcAft>
             </a:pPr>
             <a:r>
-              <a:rPr sz="1400" b="1" i="0">
+              <a:rPr sz="1400" b="1" i="0" lang="zh-CN" altLang="zh-CN">
                 <a:solidFill>
                   <a:srgbClr val="1F4E79"/>
                 </a:solidFill>
                 <a:latin typeface="Microsoft YaHei"/>
                 <a:ea typeface="Microsoft YaHei"/>
+                <a:cs typeface="Microsoft YaHei"/>
               </a:rPr>
               <a:t>运维人力释放 40%, 重复性劳动全面转向高价值网络优化与体验经营</a:t>
             </a:r>
@@ -6224,7 +6609,14 @@
           <a:bodyPr rtlCol="0" anchor="ctr"/>
           <a:lstStyle/>
           <a:p>
-            <a:pPr algn="ctr"/>
+            <a:pPr algn="ctr">
+              <a:spcBef>
+                <a:spcPts val="0"/>
+              </a:spcBef>
+              <a:spcAft>
+                <a:spcPts val="0"/>
+              </a:spcAft>
+            </a:pPr>
           </a:p>
         </p:txBody>
       </p:sp>
@@ -6254,14 +6646,21 @@
               <a:lnSpc>
                 <a:spcPct val="112000"/>
               </a:lnSpc>
+              <a:spcBef>
+                <a:spcPts val="0"/>
+              </a:spcBef>
+              <a:spcAft>
+                <a:spcPts val="0"/>
+              </a:spcAft>
             </a:pPr>
             <a:r>
-              <a:rPr sz="1400" b="1" i="0">
+              <a:rPr sz="1400" b="1" i="0" lang="zh-CN" altLang="zh-CN">
                 <a:solidFill>
                   <a:srgbClr val="262626"/>
                 </a:solidFill>
                 <a:latin typeface="Microsoft YaHei"/>
                 <a:ea typeface="Microsoft YaHei"/>
+                <a:cs typeface="Microsoft YaHei"/>
               </a:rPr>
               <a:t>MTTR -85%</a:t>
             </a:r>
@@ -6308,7 +6707,14 @@
           <a:bodyPr rtlCol="0" anchor="ctr"/>
           <a:lstStyle/>
           <a:p>
-            <a:pPr algn="ctr"/>
+            <a:pPr algn="ctr">
+              <a:spcBef>
+                <a:spcPts val="0"/>
+              </a:spcBef>
+              <a:spcAft>
+                <a:spcPts val="0"/>
+              </a:spcAft>
+            </a:pPr>
           </a:p>
         </p:txBody>
       </p:sp>
@@ -6338,14 +6744,21 @@
               <a:lnSpc>
                 <a:spcPct val="112000"/>
               </a:lnSpc>
+              <a:spcBef>
+                <a:spcPts val="0"/>
+              </a:spcBef>
+              <a:spcAft>
+                <a:spcPts val="0"/>
+              </a:spcAft>
             </a:pPr>
             <a:r>
-              <a:rPr sz="1400" b="1" i="0">
+              <a:rPr sz="1400" b="1" i="0" lang="zh-CN" altLang="zh-CN">
                 <a:solidFill>
                   <a:srgbClr val="262626"/>
                 </a:solidFill>
                 <a:latin typeface="Microsoft YaHei"/>
                 <a:ea typeface="Microsoft YaHei"/>
+                <a:cs typeface="Microsoft YaHei"/>
               </a:rPr>
               <a:t>人效 +40%</a:t>
             </a:r>
